--- a/Presentation.pptx
+++ b/Presentation.pptx
@@ -6,6 +6,7 @@
   </p:sldMasterIdLst>
   <p:sldIdLst>
     <p:sldId id="256" r:id="rId2"/>
+    <p:sldId id="257" r:id="rId3"/>
   </p:sldIdLst>
   <p:sldSz cx="12192000" cy="6858000"/>
   <p:notesSz cx="6858000" cy="9144000"/>
@@ -105,6 +106,14 @@
     </a:lvl9pPr>
   </p:defaultTextStyle>
 </p:presentation>
+</file>
+
+<file path=ppt/revisionInfo.xml><?xml version="1.0" encoding="utf-8"?>
+<p1510:revInfo xmlns:a="http://schemas.openxmlformats.org/drawingml/2006/main" xmlns:r="http://schemas.openxmlformats.org/officeDocument/2006/relationships" xmlns:p1510="http://schemas.microsoft.com/office/powerpoint/2015/10/main">
+  <p1510:revLst>
+    <p1510:client id="{A4109B1C-061B-4241-BC51-80E015890914}" v="3" dt="2026-05-04T19:33:45.113"/>
+  </p1510:revLst>
+</p1510:revInfo>
 </file>
 
 <file path=ppt/slideLayouts/slideLayout1.xml><?xml version="1.0" encoding="utf-8"?>
@@ -12996,7 +13005,12 @@
             <p:ph type="ctrTitle"/>
           </p:nvPr>
         </p:nvSpPr>
-        <p:spPr/>
+        <p:spPr>
+          <a:xfrm>
+            <a:off x="1876424" y="1122363"/>
+            <a:ext cx="8791575" cy="1163637"/>
+          </a:xfrm>
+        </p:spPr>
         <p:txBody>
           <a:bodyPr/>
           <a:lstStyle/>
@@ -13024,7 +13038,12 @@
             <p:ph type="subTitle" idx="1"/>
           </p:nvPr>
         </p:nvSpPr>
-        <p:spPr/>
+        <p:spPr>
+          <a:xfrm>
+            <a:off x="1876423" y="2286000"/>
+            <a:ext cx="8791575" cy="975388"/>
+          </a:xfrm>
+        </p:spPr>
         <p:txBody>
           <a:bodyPr/>
           <a:lstStyle/>
@@ -13041,10 +13060,178 @@
           </a:p>
         </p:txBody>
       </p:sp>
+      <p:sp>
+        <p:nvSpPr>
+          <p:cNvPr id="5" name="TextBox 4">
+            <a:extLst>
+              <a:ext uri="{FF2B5EF4-FFF2-40B4-BE49-F238E27FC236}">
+                <a16:creationId xmlns:a16="http://schemas.microsoft.com/office/drawing/2014/main" id="{B8D2829C-2373-B7B1-AE03-A3CD76B405C5}"/>
+              </a:ext>
+            </a:extLst>
+          </p:cNvPr>
+          <p:cNvSpPr txBox="1"/>
+          <p:nvPr/>
+        </p:nvSpPr>
+        <p:spPr>
+          <a:xfrm>
+            <a:off x="1876422" y="2967335"/>
+            <a:ext cx="8293396" cy="923330"/>
+          </a:xfrm>
+          <a:prstGeom prst="rect">
+            <a:avLst/>
+          </a:prstGeom>
+          <a:noFill/>
+        </p:spPr>
+        <p:txBody>
+          <a:bodyPr wrap="square" rtlCol="0">
+            <a:spAutoFit/>
+          </a:bodyPr>
+          <a:lstStyle/>
+          <a:p>
+            <a:r>
+              <a:rPr lang="en-US" dirty="0"/>
+              <a:t>Features:</a:t>
+            </a:r>
+          </a:p>
+          <a:p>
+            <a:pPr marL="285750" indent="-285750">
+              <a:buFont typeface="Arial" panose="020B0604020202020204" pitchFamily="34" charset="0"/>
+              <a:buChar char="•"/>
+            </a:pPr>
+            <a:r>
+              <a:rPr lang="en-US" dirty="0"/>
+              <a:t>Input a city and state, output current weather using </a:t>
+            </a:r>
+            <a:r>
+              <a:rPr lang="en-US" dirty="0" err="1"/>
+              <a:t>OpenWeatherMap</a:t>
+            </a:r>
+            <a:r>
+              <a:rPr lang="en-US" dirty="0"/>
+              <a:t> API</a:t>
+            </a:r>
+          </a:p>
+          <a:p>
+            <a:pPr marL="285750" indent="-285750">
+              <a:buFont typeface="Arial" panose="020B0604020202020204" pitchFamily="34" charset="0"/>
+              <a:buChar char="•"/>
+            </a:pPr>
+            <a:r>
+              <a:rPr lang="en-US" dirty="0"/>
+              <a:t>Shows some unit conversions</a:t>
+            </a:r>
+          </a:p>
+        </p:txBody>
+      </p:sp>
     </p:spTree>
     <p:extLst>
       <p:ext uri="{BB962C8B-B14F-4D97-AF65-F5344CB8AC3E}">
         <p14:creationId xmlns:p14="http://schemas.microsoft.com/office/powerpoint/2010/main" val="1267621619"/>
+      </p:ext>
+    </p:extLst>
+  </p:cSld>
+  <p:clrMapOvr>
+    <a:masterClrMapping/>
+  </p:clrMapOvr>
+</p:sld>
+</file>
+
+<file path=ppt/slides/slide2.xml><?xml version="1.0" encoding="utf-8"?>
+<p:sld xmlns:a="http://schemas.openxmlformats.org/drawingml/2006/main" xmlns:r="http://schemas.openxmlformats.org/officeDocument/2006/relationships" xmlns:p="http://schemas.openxmlformats.org/presentationml/2006/main">
+  <p:cSld>
+    <p:spTree>
+      <p:nvGrpSpPr>
+        <p:cNvPr id="1" name=""/>
+        <p:cNvGrpSpPr/>
+        <p:nvPr/>
+      </p:nvGrpSpPr>
+      <p:grpSpPr>
+        <a:xfrm>
+          <a:off x="0" y="0"/>
+          <a:ext cx="0" cy="0"/>
+          <a:chOff x="0" y="0"/>
+          <a:chExt cx="0" cy="0"/>
+        </a:xfrm>
+      </p:grpSpPr>
+      <p:sp>
+        <p:nvSpPr>
+          <p:cNvPr id="2" name="Title 1">
+            <a:extLst>
+              <a:ext uri="{FF2B5EF4-FFF2-40B4-BE49-F238E27FC236}">
+                <a16:creationId xmlns:a16="http://schemas.microsoft.com/office/drawing/2014/main" id="{05C0C1F8-1E14-F559-65A6-067B09B53DF6}"/>
+              </a:ext>
+            </a:extLst>
+          </p:cNvPr>
+          <p:cNvSpPr>
+            <a:spLocks noGrp="1"/>
+          </p:cNvSpPr>
+          <p:nvPr>
+            <p:ph type="title"/>
+          </p:nvPr>
+        </p:nvSpPr>
+        <p:spPr/>
+        <p:txBody>
+          <a:bodyPr/>
+          <a:lstStyle/>
+          <a:p>
+            <a:endParaRPr lang="en-US"/>
+          </a:p>
+        </p:txBody>
+      </p:sp>
+      <p:sp>
+        <p:nvSpPr>
+          <p:cNvPr id="3" name="Picture Placeholder 2">
+            <a:extLst>
+              <a:ext uri="{FF2B5EF4-FFF2-40B4-BE49-F238E27FC236}">
+                <a16:creationId xmlns:a16="http://schemas.microsoft.com/office/drawing/2014/main" id="{4C0DC127-90BA-28F5-0069-884B500230C3}"/>
+              </a:ext>
+            </a:extLst>
+          </p:cNvPr>
+          <p:cNvSpPr>
+            <a:spLocks noGrp="1"/>
+          </p:cNvSpPr>
+          <p:nvPr>
+            <p:ph type="pic" idx="1"/>
+          </p:nvPr>
+        </p:nvSpPr>
+        <p:spPr/>
+        <p:txBody>
+          <a:bodyPr/>
+          <a:lstStyle/>
+          <a:p>
+            <a:endParaRPr lang="en-US"/>
+          </a:p>
+        </p:txBody>
+      </p:sp>
+      <p:sp>
+        <p:nvSpPr>
+          <p:cNvPr id="4" name="Text Placeholder 3">
+            <a:extLst>
+              <a:ext uri="{FF2B5EF4-FFF2-40B4-BE49-F238E27FC236}">
+                <a16:creationId xmlns:a16="http://schemas.microsoft.com/office/drawing/2014/main" id="{E40A6186-856E-F7E3-EBBC-63BB456C1B37}"/>
+              </a:ext>
+            </a:extLst>
+          </p:cNvPr>
+          <p:cNvSpPr>
+            <a:spLocks noGrp="1"/>
+          </p:cNvSpPr>
+          <p:nvPr>
+            <p:ph type="body" sz="half" idx="2"/>
+          </p:nvPr>
+        </p:nvSpPr>
+        <p:spPr/>
+        <p:txBody>
+          <a:bodyPr/>
+          <a:lstStyle/>
+          <a:p>
+            <a:endParaRPr lang="en-US"/>
+          </a:p>
+        </p:txBody>
+      </p:sp>
+    </p:spTree>
+    <p:extLst>
+      <p:ext uri="{BB962C8B-B14F-4D97-AF65-F5344CB8AC3E}">
+        <p14:creationId xmlns:p14="http://schemas.microsoft.com/office/powerpoint/2010/main" val="1598871472"/>
       </p:ext>
     </p:extLst>
   </p:cSld>

--- a/Presentation.pptx
+++ b/Presentation.pptx
@@ -6,7 +6,10 @@
   </p:sldMasterIdLst>
   <p:sldIdLst>
     <p:sldId id="256" r:id="rId2"/>
-    <p:sldId id="257" r:id="rId3"/>
+    <p:sldId id="259" r:id="rId3"/>
+    <p:sldId id="260" r:id="rId4"/>
+    <p:sldId id="261" r:id="rId5"/>
+    <p:sldId id="262" r:id="rId6"/>
   </p:sldIdLst>
   <p:sldSz cx="12192000" cy="6858000"/>
   <p:notesSz cx="6858000" cy="9144000"/>
@@ -111,7 +114,7 @@
 <file path=ppt/revisionInfo.xml><?xml version="1.0" encoding="utf-8"?>
 <p1510:revInfo xmlns:a="http://schemas.openxmlformats.org/drawingml/2006/main" xmlns:r="http://schemas.openxmlformats.org/officeDocument/2006/relationships" xmlns:p1510="http://schemas.microsoft.com/office/powerpoint/2015/10/main">
   <p1510:revLst>
-    <p1510:client id="{A4109B1C-061B-4241-BC51-80E015890914}" v="3" dt="2026-05-04T19:33:45.113"/>
+    <p1510:client id="{A4109B1C-061B-4241-BC51-80E015890914}" v="5" dt="2026-05-04T20:06:10.217"/>
   </p1510:revLst>
 </p1510:revInfo>
 </file>
@@ -13153,85 +13156,310 @@
           <a:chExt cx="0" cy="0"/>
         </a:xfrm>
       </p:grpSpPr>
-      <p:sp>
-        <p:nvSpPr>
-          <p:cNvPr id="2" name="Title 1">
+      <p:pic>
+        <p:nvPicPr>
+          <p:cNvPr id="3" name="Picture 2">
             <a:extLst>
               <a:ext uri="{FF2B5EF4-FFF2-40B4-BE49-F238E27FC236}">
-                <a16:creationId xmlns:a16="http://schemas.microsoft.com/office/drawing/2014/main" id="{05C0C1F8-1E14-F559-65A6-067B09B53DF6}"/>
+                <a16:creationId xmlns:a16="http://schemas.microsoft.com/office/drawing/2014/main" id="{756B0087-5D7C-E383-1A25-07B92625BE9D}"/>
               </a:ext>
             </a:extLst>
           </p:cNvPr>
-          <p:cNvSpPr>
-            <a:spLocks noGrp="1"/>
-          </p:cNvSpPr>
-          <p:nvPr>
-            <p:ph type="title"/>
-          </p:nvPr>
-        </p:nvSpPr>
-        <p:spPr/>
-        <p:txBody>
-          <a:bodyPr/>
-          <a:lstStyle/>
-          <a:p>
-            <a:endParaRPr lang="en-US"/>
-          </a:p>
-        </p:txBody>
-      </p:sp>
-      <p:sp>
-        <p:nvSpPr>
-          <p:cNvPr id="3" name="Picture Placeholder 2">
+          <p:cNvPicPr>
+            <a:picLocks noChangeAspect="1"/>
+          </p:cNvPicPr>
+          <p:nvPr/>
+        </p:nvPicPr>
+        <p:blipFill>
+          <a:blip r:embed="rId2"/>
+          <a:stretch>
+            <a:fillRect/>
+          </a:stretch>
+        </p:blipFill>
+        <p:spPr>
+          <a:xfrm>
+            <a:off x="4419600" y="1290449"/>
+            <a:ext cx="7772400" cy="5567551"/>
+          </a:xfrm>
+          <a:prstGeom prst="rect">
+            <a:avLst/>
+          </a:prstGeom>
+        </p:spPr>
+      </p:pic>
+      <p:pic>
+        <p:nvPicPr>
+          <p:cNvPr id="5" name="Picture 4">
             <a:extLst>
               <a:ext uri="{FF2B5EF4-FFF2-40B4-BE49-F238E27FC236}">
-                <a16:creationId xmlns:a16="http://schemas.microsoft.com/office/drawing/2014/main" id="{4C0DC127-90BA-28F5-0069-884B500230C3}"/>
+                <a16:creationId xmlns:a16="http://schemas.microsoft.com/office/drawing/2014/main" id="{36B2D31A-A1AE-46FA-0CA0-C7ACD05F085D}"/>
               </a:ext>
             </a:extLst>
           </p:cNvPr>
-          <p:cNvSpPr>
-            <a:spLocks noGrp="1"/>
-          </p:cNvSpPr>
-          <p:nvPr>
-            <p:ph type="pic" idx="1"/>
-          </p:nvPr>
-        </p:nvSpPr>
-        <p:spPr/>
-        <p:txBody>
-          <a:bodyPr/>
-          <a:lstStyle/>
-          <a:p>
-            <a:endParaRPr lang="en-US"/>
-          </a:p>
-        </p:txBody>
-      </p:sp>
-      <p:sp>
-        <p:nvSpPr>
-          <p:cNvPr id="4" name="Text Placeholder 3">
+          <p:cNvPicPr>
+            <a:picLocks noChangeAspect="1"/>
+          </p:cNvPicPr>
+          <p:nvPr/>
+        </p:nvPicPr>
+        <p:blipFill>
+          <a:blip r:embed="rId3"/>
+          <a:stretch>
+            <a:fillRect/>
+          </a:stretch>
+        </p:blipFill>
+        <p:spPr>
+          <a:xfrm>
+            <a:off x="0" y="0"/>
+            <a:ext cx="5803900" cy="1244600"/>
+          </a:xfrm>
+          <a:prstGeom prst="rect">
+            <a:avLst/>
+          </a:prstGeom>
+        </p:spPr>
+      </p:pic>
+    </p:spTree>
+    <p:extLst>
+      <p:ext uri="{BB962C8B-B14F-4D97-AF65-F5344CB8AC3E}">
+        <p14:creationId xmlns:p14="http://schemas.microsoft.com/office/powerpoint/2010/main" val="860209295"/>
+      </p:ext>
+    </p:extLst>
+  </p:cSld>
+  <p:clrMapOvr>
+    <a:masterClrMapping/>
+  </p:clrMapOvr>
+</p:sld>
+</file>
+
+<file path=ppt/slides/slide3.xml><?xml version="1.0" encoding="utf-8"?>
+<p:sld xmlns:a="http://schemas.openxmlformats.org/drawingml/2006/main" xmlns:r="http://schemas.openxmlformats.org/officeDocument/2006/relationships" xmlns:p="http://schemas.openxmlformats.org/presentationml/2006/main">
+  <p:cSld>
+    <p:spTree>
+      <p:nvGrpSpPr>
+        <p:cNvPr id="1" name=""/>
+        <p:cNvGrpSpPr/>
+        <p:nvPr/>
+      </p:nvGrpSpPr>
+      <p:grpSpPr>
+        <a:xfrm>
+          <a:off x="0" y="0"/>
+          <a:ext cx="0" cy="0"/>
+          <a:chOff x="0" y="0"/>
+          <a:chExt cx="0" cy="0"/>
+        </a:xfrm>
+      </p:grpSpPr>
+      <p:pic>
+        <p:nvPicPr>
+          <p:cNvPr id="3" name="Picture 2">
             <a:extLst>
               <a:ext uri="{FF2B5EF4-FFF2-40B4-BE49-F238E27FC236}">
-                <a16:creationId xmlns:a16="http://schemas.microsoft.com/office/drawing/2014/main" id="{E40A6186-856E-F7E3-EBBC-63BB456C1B37}"/>
+                <a16:creationId xmlns:a16="http://schemas.microsoft.com/office/drawing/2014/main" id="{532CAA6C-B919-FBE5-AF32-A3174D02CDD4}"/>
               </a:ext>
             </a:extLst>
           </p:cNvPr>
-          <p:cNvSpPr>
-            <a:spLocks noGrp="1"/>
-          </p:cNvSpPr>
-          <p:nvPr>
-            <p:ph type="body" sz="half" idx="2"/>
-          </p:nvPr>
-        </p:nvSpPr>
-        <p:spPr/>
-        <p:txBody>
-          <a:bodyPr/>
-          <a:lstStyle/>
-          <a:p>
-            <a:endParaRPr lang="en-US"/>
-          </a:p>
-        </p:txBody>
-      </p:sp>
+          <p:cNvPicPr>
+            <a:picLocks noChangeAspect="1"/>
+          </p:cNvPicPr>
+          <p:nvPr/>
+        </p:nvPicPr>
+        <p:blipFill>
+          <a:blip r:embed="rId2"/>
+          <a:stretch>
+            <a:fillRect/>
+          </a:stretch>
+        </p:blipFill>
+        <p:spPr>
+          <a:xfrm>
+            <a:off x="1626287" y="1587500"/>
+            <a:ext cx="4318000" cy="3683000"/>
+          </a:xfrm>
+          <a:prstGeom prst="rect">
+            <a:avLst/>
+          </a:prstGeom>
+        </p:spPr>
+      </p:pic>
+      <p:pic>
+        <p:nvPicPr>
+          <p:cNvPr id="5" name="Picture 4">
+            <a:extLst>
+              <a:ext uri="{FF2B5EF4-FFF2-40B4-BE49-F238E27FC236}">
+                <a16:creationId xmlns:a16="http://schemas.microsoft.com/office/drawing/2014/main" id="{6363DD0A-BFFA-122E-8433-318F01CA6DE7}"/>
+              </a:ext>
+            </a:extLst>
+          </p:cNvPr>
+          <p:cNvPicPr>
+            <a:picLocks noChangeAspect="1"/>
+          </p:cNvPicPr>
+          <p:nvPr/>
+        </p:nvPicPr>
+        <p:blipFill>
+          <a:blip r:embed="rId3"/>
+          <a:stretch>
+            <a:fillRect/>
+          </a:stretch>
+        </p:blipFill>
+        <p:spPr>
+          <a:xfrm>
+            <a:off x="6795359" y="1962150"/>
+            <a:ext cx="3568700" cy="2933700"/>
+          </a:xfrm>
+          <a:prstGeom prst="rect">
+            <a:avLst/>
+          </a:prstGeom>
+        </p:spPr>
+      </p:pic>
     </p:spTree>
     <p:extLst>
       <p:ext uri="{BB962C8B-B14F-4D97-AF65-F5344CB8AC3E}">
-        <p14:creationId xmlns:p14="http://schemas.microsoft.com/office/powerpoint/2010/main" val="1598871472"/>
+        <p14:creationId xmlns:p14="http://schemas.microsoft.com/office/powerpoint/2010/main" val="2046965185"/>
+      </p:ext>
+    </p:extLst>
+  </p:cSld>
+  <p:clrMapOvr>
+    <a:masterClrMapping/>
+  </p:clrMapOvr>
+</p:sld>
+</file>
+
+<file path=ppt/slides/slide4.xml><?xml version="1.0" encoding="utf-8"?>
+<p:sld xmlns:a="http://schemas.openxmlformats.org/drawingml/2006/main" xmlns:r="http://schemas.openxmlformats.org/officeDocument/2006/relationships" xmlns:p="http://schemas.openxmlformats.org/presentationml/2006/main">
+  <p:cSld>
+    <p:spTree>
+      <p:nvGrpSpPr>
+        <p:cNvPr id="1" name=""/>
+        <p:cNvGrpSpPr/>
+        <p:nvPr/>
+      </p:nvGrpSpPr>
+      <p:grpSpPr>
+        <a:xfrm>
+          <a:off x="0" y="0"/>
+          <a:ext cx="0" cy="0"/>
+          <a:chOff x="0" y="0"/>
+          <a:chExt cx="0" cy="0"/>
+        </a:xfrm>
+      </p:grpSpPr>
+      <p:pic>
+        <p:nvPicPr>
+          <p:cNvPr id="3" name="Picture 2">
+            <a:extLst>
+              <a:ext uri="{FF2B5EF4-FFF2-40B4-BE49-F238E27FC236}">
+                <a16:creationId xmlns:a16="http://schemas.microsoft.com/office/drawing/2014/main" id="{EA3F3FF8-468D-54DE-7A96-341AF746979B}"/>
+              </a:ext>
+            </a:extLst>
+          </p:cNvPr>
+          <p:cNvPicPr>
+            <a:picLocks noChangeAspect="1"/>
+          </p:cNvPicPr>
+          <p:nvPr/>
+        </p:nvPicPr>
+        <p:blipFill>
+          <a:blip r:embed="rId2"/>
+          <a:stretch>
+            <a:fillRect/>
+          </a:stretch>
+        </p:blipFill>
+        <p:spPr>
+          <a:xfrm>
+            <a:off x="2705100" y="406400"/>
+            <a:ext cx="6781800" cy="6045200"/>
+          </a:xfrm>
+          <a:prstGeom prst="rect">
+            <a:avLst/>
+          </a:prstGeom>
+        </p:spPr>
+      </p:pic>
+    </p:spTree>
+    <p:extLst>
+      <p:ext uri="{BB962C8B-B14F-4D97-AF65-F5344CB8AC3E}">
+        <p14:creationId xmlns:p14="http://schemas.microsoft.com/office/powerpoint/2010/main" val="150933111"/>
+      </p:ext>
+    </p:extLst>
+  </p:cSld>
+  <p:clrMapOvr>
+    <a:masterClrMapping/>
+  </p:clrMapOvr>
+</p:sld>
+</file>
+
+<file path=ppt/slides/slide5.xml><?xml version="1.0" encoding="utf-8"?>
+<p:sld xmlns:a="http://schemas.openxmlformats.org/drawingml/2006/main" xmlns:r="http://schemas.openxmlformats.org/officeDocument/2006/relationships" xmlns:p="http://schemas.openxmlformats.org/presentationml/2006/main">
+  <p:cSld>
+    <p:spTree>
+      <p:nvGrpSpPr>
+        <p:cNvPr id="1" name=""/>
+        <p:cNvGrpSpPr/>
+        <p:nvPr/>
+      </p:nvGrpSpPr>
+      <p:grpSpPr>
+        <a:xfrm>
+          <a:off x="0" y="0"/>
+          <a:ext cx="0" cy="0"/>
+          <a:chOff x="0" y="0"/>
+          <a:chExt cx="0" cy="0"/>
+        </a:xfrm>
+      </p:grpSpPr>
+      <p:pic>
+        <p:nvPicPr>
+          <p:cNvPr id="3" name="Picture 2">
+            <a:extLst>
+              <a:ext uri="{FF2B5EF4-FFF2-40B4-BE49-F238E27FC236}">
+                <a16:creationId xmlns:a16="http://schemas.microsoft.com/office/drawing/2014/main" id="{325EB3C4-AE82-2FA5-BC59-49729AC95DFA}"/>
+              </a:ext>
+            </a:extLst>
+          </p:cNvPr>
+          <p:cNvPicPr>
+            <a:picLocks noChangeAspect="1"/>
+          </p:cNvPicPr>
+          <p:nvPr/>
+        </p:nvPicPr>
+        <p:blipFill>
+          <a:blip r:embed="rId2"/>
+          <a:stretch>
+            <a:fillRect/>
+          </a:stretch>
+        </p:blipFill>
+        <p:spPr>
+          <a:xfrm>
+            <a:off x="2209800" y="975840"/>
+            <a:ext cx="7772400" cy="2657051"/>
+          </a:xfrm>
+          <a:prstGeom prst="rect">
+            <a:avLst/>
+          </a:prstGeom>
+        </p:spPr>
+      </p:pic>
+      <p:pic>
+        <p:nvPicPr>
+          <p:cNvPr id="5" name="Picture 4">
+            <a:extLst>
+              <a:ext uri="{FF2B5EF4-FFF2-40B4-BE49-F238E27FC236}">
+                <a16:creationId xmlns:a16="http://schemas.microsoft.com/office/drawing/2014/main" id="{EA8A7B0C-DDD8-BF7E-A92B-172FFF907592}"/>
+              </a:ext>
+            </a:extLst>
+          </p:cNvPr>
+          <p:cNvPicPr>
+            <a:picLocks noChangeAspect="1"/>
+          </p:cNvPicPr>
+          <p:nvPr/>
+        </p:nvPicPr>
+        <p:blipFill>
+          <a:blip r:embed="rId3"/>
+          <a:stretch>
+            <a:fillRect/>
+          </a:stretch>
+        </p:blipFill>
+        <p:spPr>
+          <a:xfrm>
+            <a:off x="3733800" y="3985055"/>
+            <a:ext cx="4724400" cy="2222500"/>
+          </a:xfrm>
+          <a:prstGeom prst="rect">
+            <a:avLst/>
+          </a:prstGeom>
+        </p:spPr>
+      </p:pic>
+    </p:spTree>
+    <p:extLst>
+      <p:ext uri="{BB962C8B-B14F-4D97-AF65-F5344CB8AC3E}">
+        <p14:creationId xmlns:p14="http://schemas.microsoft.com/office/powerpoint/2010/main" val="104079258"/>
       </p:ext>
     </p:extLst>
   </p:cSld>

--- a/Presentation.pptx
+++ b/Presentation.pptx
@@ -108,6 +108,11 @@
       </a:defRPr>
     </a:lvl9pPr>
   </p:defaultTextStyle>
+  <p:extLst>
+    <p:ext uri="{EFAFB233-063F-42B5-8137-9DF3F51BA10A}">
+      <p15:sldGuideLst xmlns:p15="http://schemas.microsoft.com/office/powerpoint/2012/main"/>
+    </p:ext>
+  </p:extLst>
 </p:presentation>
 </file>
 
@@ -169,7 +174,7 @@
           <a:noFill/>
           <a:extLst>
             <a:ext uri="{909E8E84-426E-40dd-AFC4-6F175D3DCCD1}">
-              <a14:hiddenFill xmlns:a14="http://schemas.microsoft.com/office/drawing/2010/main" xmlns="">
+              <a14:hiddenFill xmlns="" xmlns:a14="http://schemas.microsoft.com/office/drawing/2010/main">
                 <a:solidFill>
                   <a:srgbClr val="FFFFFF"/>
                 </a:solidFill>
@@ -229,7 +234,7 @@
             </a:ln>
             <a:extLst>
               <a:ext uri="{91240B29-F687-4f45-9708-019B960494DF}">
-                <a14:hiddenLine xmlns:a14="http://schemas.microsoft.com/office/drawing/2010/main" xmlns="" w="9525">
+                <a14:hiddenLine xmlns="" xmlns:a14="http://schemas.microsoft.com/office/drawing/2010/main" w="9525">
                   <a:solidFill>
                     <a:srgbClr val="000000"/>
                   </a:solidFill>
@@ -326,7 +331,7 @@
             </a:ln>
             <a:extLst>
               <a:ext uri="{91240B29-F687-4f45-9708-019B960494DF}">
-                <a14:hiddenLine xmlns:a14="http://schemas.microsoft.com/office/drawing/2010/main" xmlns="" w="9525">
+                <a14:hiddenLine xmlns="" xmlns:a14="http://schemas.microsoft.com/office/drawing/2010/main" w="9525">
                   <a:solidFill>
                     <a:srgbClr val="000000"/>
                   </a:solidFill>
@@ -423,7 +428,7 @@
             </a:ln>
             <a:extLst>
               <a:ext uri="{91240B29-F687-4f45-9708-019B960494DF}">
-                <a14:hiddenLine xmlns:a14="http://schemas.microsoft.com/office/drawing/2010/main" xmlns="" w="9525">
+                <a14:hiddenLine xmlns="" xmlns:a14="http://schemas.microsoft.com/office/drawing/2010/main" w="9525">
                   <a:solidFill>
                     <a:srgbClr val="000000"/>
                   </a:solidFill>
@@ -464,7 +469,7 @@
             </a:ln>
             <a:extLst>
               <a:ext uri="{91240B29-F687-4f45-9708-019B960494DF}">
-                <a14:hiddenLine xmlns:a14="http://schemas.microsoft.com/office/drawing/2010/main" xmlns="" w="9525">
+                <a14:hiddenLine xmlns="" xmlns:a14="http://schemas.microsoft.com/office/drawing/2010/main" w="9525">
                   <a:solidFill>
                     <a:srgbClr val="000000"/>
                   </a:solidFill>
@@ -561,7 +566,7 @@
             </a:ln>
             <a:extLst>
               <a:ext uri="{91240B29-F687-4f45-9708-019B960494DF}">
-                <a14:hiddenLine xmlns:a14="http://schemas.microsoft.com/office/drawing/2010/main" xmlns="" w="9525">
+                <a14:hiddenLine xmlns="" xmlns:a14="http://schemas.microsoft.com/office/drawing/2010/main" w="9525">
                   <a:solidFill>
                     <a:srgbClr val="000000"/>
                   </a:solidFill>
@@ -630,7 +635,7 @@
             </a:ln>
             <a:extLst>
               <a:ext uri="{91240B29-F687-4f45-9708-019B960494DF}">
-                <a14:hiddenLine xmlns:a14="http://schemas.microsoft.com/office/drawing/2010/main" xmlns="" w="9525">
+                <a14:hiddenLine xmlns="" xmlns:a14="http://schemas.microsoft.com/office/drawing/2010/main" w="9525">
                   <a:solidFill>
                     <a:srgbClr val="000000"/>
                   </a:solidFill>
@@ -699,7 +704,7 @@
             </a:ln>
             <a:extLst>
               <a:ext uri="{91240B29-F687-4f45-9708-019B960494DF}">
-                <a14:hiddenLine xmlns:a14="http://schemas.microsoft.com/office/drawing/2010/main" xmlns="" w="9525">
+                <a14:hiddenLine xmlns="" xmlns:a14="http://schemas.microsoft.com/office/drawing/2010/main" w="9525">
                   <a:solidFill>
                     <a:srgbClr val="000000"/>
                   </a:solidFill>
@@ -796,7 +801,7 @@
             </a:ln>
             <a:extLst>
               <a:ext uri="{91240B29-F687-4f45-9708-019B960494DF}">
-                <a14:hiddenLine xmlns:a14="http://schemas.microsoft.com/office/drawing/2010/main" xmlns="" w="9525">
+                <a14:hiddenLine xmlns="" xmlns:a14="http://schemas.microsoft.com/office/drawing/2010/main" w="9525">
                   <a:solidFill>
                     <a:srgbClr val="000000"/>
                   </a:solidFill>
@@ -865,7 +870,7 @@
             </a:ln>
             <a:extLst>
               <a:ext uri="{91240B29-F687-4f45-9708-019B960494DF}">
-                <a14:hiddenLine xmlns:a14="http://schemas.microsoft.com/office/drawing/2010/main" xmlns="" w="9525">
+                <a14:hiddenLine xmlns="" xmlns:a14="http://schemas.microsoft.com/office/drawing/2010/main" w="9525">
                   <a:solidFill>
                     <a:srgbClr val="000000"/>
                   </a:solidFill>
@@ -934,7 +939,7 @@
             </a:ln>
             <a:extLst>
               <a:ext uri="{91240B29-F687-4f45-9708-019B960494DF}">
-                <a14:hiddenLine xmlns:a14="http://schemas.microsoft.com/office/drawing/2010/main" xmlns="" w="9525">
+                <a14:hiddenLine xmlns="" xmlns:a14="http://schemas.microsoft.com/office/drawing/2010/main" w="9525">
                   <a:solidFill>
                     <a:srgbClr val="000000"/>
                   </a:solidFill>
@@ -1031,7 +1036,7 @@
             </a:ln>
             <a:extLst>
               <a:ext uri="{91240B29-F687-4f45-9708-019B960494DF}">
-                <a14:hiddenLine xmlns:a14="http://schemas.microsoft.com/office/drawing/2010/main" xmlns="" w="9525">
+                <a14:hiddenLine xmlns="" xmlns:a14="http://schemas.microsoft.com/office/drawing/2010/main" w="9525">
                   <a:solidFill>
                     <a:srgbClr val="000000"/>
                   </a:solidFill>
@@ -1128,7 +1133,7 @@
             </a:ln>
             <a:extLst>
               <a:ext uri="{91240B29-F687-4f45-9708-019B960494DF}">
-                <a14:hiddenLine xmlns:a14="http://schemas.microsoft.com/office/drawing/2010/main" xmlns="" w="9525">
+                <a14:hiddenLine xmlns="" xmlns:a14="http://schemas.microsoft.com/office/drawing/2010/main" w="9525">
                   <a:solidFill>
                     <a:srgbClr val="000000"/>
                   </a:solidFill>
@@ -1197,7 +1202,7 @@
             </a:ln>
             <a:extLst>
               <a:ext uri="{91240B29-F687-4f45-9708-019B960494DF}">
-                <a14:hiddenLine xmlns:a14="http://schemas.microsoft.com/office/drawing/2010/main" xmlns="" w="9525">
+                <a14:hiddenLine xmlns="" xmlns:a14="http://schemas.microsoft.com/office/drawing/2010/main" w="9525">
                   <a:solidFill>
                     <a:srgbClr val="000000"/>
                   </a:solidFill>
@@ -1314,7 +1319,7 @@
             </a:ln>
             <a:extLst>
               <a:ext uri="{91240B29-F687-4f45-9708-019B960494DF}">
-                <a14:hiddenLine xmlns:a14="http://schemas.microsoft.com/office/drawing/2010/main" xmlns="" w="9525">
+                <a14:hiddenLine xmlns="" xmlns:a14="http://schemas.microsoft.com/office/drawing/2010/main" w="9525">
                   <a:solidFill>
                     <a:srgbClr val="000000"/>
                   </a:solidFill>
@@ -1383,7 +1388,7 @@
             </a:ln>
             <a:extLst>
               <a:ext uri="{91240B29-F687-4f45-9708-019B960494DF}">
-                <a14:hiddenLine xmlns:a14="http://schemas.microsoft.com/office/drawing/2010/main" xmlns="" w="9525">
+                <a14:hiddenLine xmlns="" xmlns:a14="http://schemas.microsoft.com/office/drawing/2010/main" w="9525">
                   <a:solidFill>
                     <a:srgbClr val="000000"/>
                   </a:solidFill>
@@ -1480,7 +1485,7 @@
             </a:ln>
             <a:extLst>
               <a:ext uri="{91240B29-F687-4f45-9708-019B960494DF}">
-                <a14:hiddenLine xmlns:a14="http://schemas.microsoft.com/office/drawing/2010/main" xmlns="" w="9525">
+                <a14:hiddenLine xmlns="" xmlns:a14="http://schemas.microsoft.com/office/drawing/2010/main" w="9525">
                   <a:solidFill>
                     <a:srgbClr val="000000"/>
                   </a:solidFill>
@@ -1577,7 +1582,7 @@
             </a:ln>
             <a:extLst>
               <a:ext uri="{91240B29-F687-4f45-9708-019B960494DF}">
-                <a14:hiddenLine xmlns:a14="http://schemas.microsoft.com/office/drawing/2010/main" xmlns="" w="9525">
+                <a14:hiddenLine xmlns="" xmlns:a14="http://schemas.microsoft.com/office/drawing/2010/main" w="9525">
                   <a:solidFill>
                     <a:srgbClr val="000000"/>
                   </a:solidFill>
@@ -1646,7 +1651,7 @@
             </a:ln>
             <a:extLst>
               <a:ext uri="{91240B29-F687-4f45-9708-019B960494DF}">
-                <a14:hiddenLine xmlns:a14="http://schemas.microsoft.com/office/drawing/2010/main" xmlns="" w="9525">
+                <a14:hiddenLine xmlns="" xmlns:a14="http://schemas.microsoft.com/office/drawing/2010/main" w="9525">
                   <a:solidFill>
                     <a:srgbClr val="000000"/>
                   </a:solidFill>
@@ -1743,7 +1748,7 @@
             </a:ln>
             <a:extLst>
               <a:ext uri="{91240B29-F687-4f45-9708-019B960494DF}">
-                <a14:hiddenLine xmlns:a14="http://schemas.microsoft.com/office/drawing/2010/main" xmlns="" w="9525">
+                <a14:hiddenLine xmlns="" xmlns:a14="http://schemas.microsoft.com/office/drawing/2010/main" w="9525">
                   <a:solidFill>
                     <a:srgbClr val="000000"/>
                   </a:solidFill>
@@ -1840,7 +1845,7 @@
             </a:ln>
             <a:extLst>
               <a:ext uri="{91240B29-F687-4f45-9708-019B960494DF}">
-                <a14:hiddenLine xmlns:a14="http://schemas.microsoft.com/office/drawing/2010/main" xmlns="" w="9525">
+                <a14:hiddenLine xmlns="" xmlns:a14="http://schemas.microsoft.com/office/drawing/2010/main" w="9525">
                   <a:solidFill>
                     <a:srgbClr val="000000"/>
                   </a:solidFill>
@@ -1903,7 +1908,7 @@
             </a:ln>
             <a:extLst>
               <a:ext uri="{91240B29-F687-4f45-9708-019B960494DF}">
-                <a14:hiddenLine xmlns:a14="http://schemas.microsoft.com/office/drawing/2010/main" xmlns="" w="9525">
+                <a14:hiddenLine xmlns="" xmlns:a14="http://schemas.microsoft.com/office/drawing/2010/main" w="9525">
                   <a:solidFill>
                     <a:srgbClr val="000000"/>
                   </a:solidFill>
@@ -2000,7 +2005,7 @@
             </a:ln>
             <a:extLst>
               <a:ext uri="{91240B29-F687-4f45-9708-019B960494DF}">
-                <a14:hiddenLine xmlns:a14="http://schemas.microsoft.com/office/drawing/2010/main" xmlns="" w="9525">
+                <a14:hiddenLine xmlns="" xmlns:a14="http://schemas.microsoft.com/office/drawing/2010/main" w="9525">
                   <a:solidFill>
                     <a:srgbClr val="000000"/>
                   </a:solidFill>
@@ -2063,7 +2068,7 @@
             </a:ln>
             <a:extLst>
               <a:ext uri="{91240B29-F687-4f45-9708-019B960494DF}">
-                <a14:hiddenLine xmlns:a14="http://schemas.microsoft.com/office/drawing/2010/main" xmlns="" w="9525">
+                <a14:hiddenLine xmlns="" xmlns:a14="http://schemas.microsoft.com/office/drawing/2010/main" w="9525">
                   <a:solidFill>
                     <a:srgbClr val="000000"/>
                   </a:solidFill>
@@ -2160,7 +2165,7 @@
             </a:ln>
             <a:extLst>
               <a:ext uri="{91240B29-F687-4f45-9708-019B960494DF}">
-                <a14:hiddenLine xmlns:a14="http://schemas.microsoft.com/office/drawing/2010/main" xmlns="" w="9525">
+                <a14:hiddenLine xmlns="" xmlns:a14="http://schemas.microsoft.com/office/drawing/2010/main" w="9525">
                   <a:solidFill>
                     <a:srgbClr val="000000"/>
                   </a:solidFill>
@@ -2235,7 +2240,7 @@
             </a:ln>
             <a:extLst>
               <a:ext uri="{91240B29-F687-4f45-9708-019B960494DF}">
-                <a14:hiddenLine xmlns:a14="http://schemas.microsoft.com/office/drawing/2010/main" xmlns="" w="9525">
+                <a14:hiddenLine xmlns="" xmlns:a14="http://schemas.microsoft.com/office/drawing/2010/main" w="9525">
                   <a:solidFill>
                     <a:srgbClr val="000000"/>
                   </a:solidFill>
@@ -2332,7 +2337,7 @@
             </a:ln>
             <a:extLst>
               <a:ext uri="{91240B29-F687-4f45-9708-019B960494DF}">
-                <a14:hiddenLine xmlns:a14="http://schemas.microsoft.com/office/drawing/2010/main" xmlns="" w="9525">
+                <a14:hiddenLine xmlns="" xmlns:a14="http://schemas.microsoft.com/office/drawing/2010/main" w="9525">
                   <a:solidFill>
                     <a:srgbClr val="000000"/>
                   </a:solidFill>
@@ -2407,7 +2412,7 @@
             </a:ln>
             <a:extLst>
               <a:ext uri="{91240B29-F687-4f45-9708-019B960494DF}">
-                <a14:hiddenLine xmlns:a14="http://schemas.microsoft.com/office/drawing/2010/main" xmlns="" w="9525">
+                <a14:hiddenLine xmlns="" xmlns:a14="http://schemas.microsoft.com/office/drawing/2010/main" w="9525">
                   <a:solidFill>
                     <a:srgbClr val="000000"/>
                   </a:solidFill>
@@ -2504,7 +2509,7 @@
             </a:ln>
             <a:extLst>
               <a:ext uri="{91240B29-F687-4f45-9708-019B960494DF}">
-                <a14:hiddenLine xmlns:a14="http://schemas.microsoft.com/office/drawing/2010/main" xmlns="" w="9525">
+                <a14:hiddenLine xmlns="" xmlns:a14="http://schemas.microsoft.com/office/drawing/2010/main" w="9525">
                   <a:solidFill>
                     <a:srgbClr val="000000"/>
                   </a:solidFill>
@@ -2545,7 +2550,7 @@
             </a:ln>
             <a:extLst>
               <a:ext uri="{91240B29-F687-4f45-9708-019B960494DF}">
-                <a14:hiddenLine xmlns:a14="http://schemas.microsoft.com/office/drawing/2010/main" xmlns="" w="9525">
+                <a14:hiddenLine xmlns="" xmlns:a14="http://schemas.microsoft.com/office/drawing/2010/main" w="9525">
                   <a:solidFill>
                     <a:srgbClr val="000000"/>
                   </a:solidFill>
@@ -2642,7 +2647,7 @@
             </a:ln>
             <a:extLst>
               <a:ext uri="{91240B29-F687-4f45-9708-019B960494DF}">
-                <a14:hiddenLine xmlns:a14="http://schemas.microsoft.com/office/drawing/2010/main" xmlns="" w="9525">
+                <a14:hiddenLine xmlns="" xmlns:a14="http://schemas.microsoft.com/office/drawing/2010/main" w="9525">
                   <a:solidFill>
                     <a:srgbClr val="000000"/>
                   </a:solidFill>
@@ -2711,7 +2716,7 @@
             </a:ln>
             <a:extLst>
               <a:ext uri="{91240B29-F687-4f45-9708-019B960494DF}">
-                <a14:hiddenLine xmlns:a14="http://schemas.microsoft.com/office/drawing/2010/main" xmlns="" w="9525">
+                <a14:hiddenLine xmlns="" xmlns:a14="http://schemas.microsoft.com/office/drawing/2010/main" w="9525">
                   <a:solidFill>
                     <a:srgbClr val="000000"/>
                   </a:solidFill>
@@ -2780,7 +2785,7 @@
             </a:ln>
             <a:extLst>
               <a:ext uri="{91240B29-F687-4f45-9708-019B960494DF}">
-                <a14:hiddenLine xmlns:a14="http://schemas.microsoft.com/office/drawing/2010/main" xmlns="" w="9525">
+                <a14:hiddenLine xmlns="" xmlns:a14="http://schemas.microsoft.com/office/drawing/2010/main" w="9525">
                   <a:solidFill>
                     <a:srgbClr val="000000"/>
                   </a:solidFill>
@@ -2877,7 +2882,7 @@
             </a:ln>
             <a:extLst>
               <a:ext uri="{91240B29-F687-4f45-9708-019B960494DF}">
-                <a14:hiddenLine xmlns:a14="http://schemas.microsoft.com/office/drawing/2010/main" xmlns="" w="9525">
+                <a14:hiddenLine xmlns="" xmlns:a14="http://schemas.microsoft.com/office/drawing/2010/main" w="9525">
                   <a:solidFill>
                     <a:srgbClr val="000000"/>
                   </a:solidFill>
@@ -2952,7 +2957,7 @@
             </a:ln>
             <a:extLst>
               <a:ext uri="{91240B29-F687-4f45-9708-019B960494DF}">
-                <a14:hiddenLine xmlns:a14="http://schemas.microsoft.com/office/drawing/2010/main" xmlns="" w="9525">
+                <a14:hiddenLine xmlns="" xmlns:a14="http://schemas.microsoft.com/office/drawing/2010/main" w="9525">
                   <a:solidFill>
                     <a:srgbClr val="000000"/>
                   </a:solidFill>
@@ -3021,7 +3026,7 @@
             </a:ln>
             <a:extLst>
               <a:ext uri="{91240B29-F687-4f45-9708-019B960494DF}">
-                <a14:hiddenLine xmlns:a14="http://schemas.microsoft.com/office/drawing/2010/main" xmlns="" w="9525">
+                <a14:hiddenLine xmlns="" xmlns:a14="http://schemas.microsoft.com/office/drawing/2010/main" w="9525">
                   <a:solidFill>
                     <a:srgbClr val="000000"/>
                   </a:solidFill>
@@ -3118,7 +3123,7 @@
             </a:ln>
             <a:extLst>
               <a:ext uri="{91240B29-F687-4f45-9708-019B960494DF}">
-                <a14:hiddenLine xmlns:a14="http://schemas.microsoft.com/office/drawing/2010/main" xmlns="" w="9525">
+                <a14:hiddenLine xmlns="" xmlns:a14="http://schemas.microsoft.com/office/drawing/2010/main" w="9525">
                   <a:solidFill>
                     <a:srgbClr val="000000"/>
                   </a:solidFill>
@@ -3187,7 +3192,7 @@
             </a:ln>
             <a:extLst>
               <a:ext uri="{91240B29-F687-4f45-9708-019B960494DF}">
-                <a14:hiddenLine xmlns:a14="http://schemas.microsoft.com/office/drawing/2010/main" xmlns="" w="9525">
+                <a14:hiddenLine xmlns="" xmlns:a14="http://schemas.microsoft.com/office/drawing/2010/main" w="9525">
                   <a:solidFill>
                     <a:srgbClr val="000000"/>
                   </a:solidFill>
@@ -3284,7 +3289,7 @@
             </a:ln>
             <a:extLst>
               <a:ext uri="{91240B29-F687-4f45-9708-019B960494DF}">
-                <a14:hiddenLine xmlns:a14="http://schemas.microsoft.com/office/drawing/2010/main" xmlns="" w="9525">
+                <a14:hiddenLine xmlns="" xmlns:a14="http://schemas.microsoft.com/office/drawing/2010/main" w="9525">
                   <a:solidFill>
                     <a:srgbClr val="000000"/>
                   </a:solidFill>
@@ -3353,7 +3358,7 @@
             </a:ln>
             <a:extLst>
               <a:ext uri="{91240B29-F687-4f45-9708-019B960494DF}">
-                <a14:hiddenLine xmlns:a14="http://schemas.microsoft.com/office/drawing/2010/main" xmlns="" w="9525">
+                <a14:hiddenLine xmlns="" xmlns:a14="http://schemas.microsoft.com/office/drawing/2010/main" w="9525">
                   <a:solidFill>
                     <a:srgbClr val="000000"/>
                   </a:solidFill>
@@ -3450,7 +3455,7 @@
             </a:ln>
             <a:extLst>
               <a:ext uri="{91240B29-F687-4f45-9708-019B960494DF}">
-                <a14:hiddenLine xmlns:a14="http://schemas.microsoft.com/office/drawing/2010/main" xmlns="" w="9525">
+                <a14:hiddenLine xmlns="" xmlns:a14="http://schemas.microsoft.com/office/drawing/2010/main" w="9525">
                   <a:solidFill>
                     <a:srgbClr val="000000"/>
                   </a:solidFill>
@@ -3491,7 +3496,7 @@
             </a:ln>
             <a:extLst>
               <a:ext uri="{91240B29-F687-4f45-9708-019B960494DF}">
-                <a14:hiddenLine xmlns:a14="http://schemas.microsoft.com/office/drawing/2010/main" xmlns="" w="9525">
+                <a14:hiddenLine xmlns="" xmlns:a14="http://schemas.microsoft.com/office/drawing/2010/main" w="9525">
                   <a:solidFill>
                     <a:srgbClr val="000000"/>
                   </a:solidFill>
@@ -3563,7 +3568,7 @@
             </a:ln>
             <a:extLst>
               <a:ext uri="{91240B29-F687-4f45-9708-019B960494DF}">
-                <a14:hiddenLine xmlns:a14="http://schemas.microsoft.com/office/drawing/2010/main" xmlns="" w="9525">
+                <a14:hiddenLine xmlns="" xmlns:a14="http://schemas.microsoft.com/office/drawing/2010/main" w="9525">
                   <a:solidFill>
                     <a:srgbClr val="000000"/>
                   </a:solidFill>
@@ -3660,7 +3665,7 @@
             </a:ln>
             <a:extLst>
               <a:ext uri="{91240B29-F687-4f45-9708-019B960494DF}">
-                <a14:hiddenLine xmlns:a14="http://schemas.microsoft.com/office/drawing/2010/main" xmlns="" w="9525">
+                <a14:hiddenLine xmlns="" xmlns:a14="http://schemas.microsoft.com/office/drawing/2010/main" w="9525">
                   <a:solidFill>
                     <a:srgbClr val="000000"/>
                   </a:solidFill>
@@ -3729,7 +3734,7 @@
             </a:ln>
             <a:extLst>
               <a:ext uri="{91240B29-F687-4f45-9708-019B960494DF}">
-                <a14:hiddenLine xmlns:a14="http://schemas.microsoft.com/office/drawing/2010/main" xmlns="" w="9525">
+                <a14:hiddenLine xmlns="" xmlns:a14="http://schemas.microsoft.com/office/drawing/2010/main" w="9525">
                   <a:solidFill>
                     <a:srgbClr val="000000"/>
                   </a:solidFill>
@@ -3826,7 +3831,7 @@
             </a:ln>
             <a:extLst>
               <a:ext uri="{91240B29-F687-4f45-9708-019B960494DF}">
-                <a14:hiddenLine xmlns:a14="http://schemas.microsoft.com/office/drawing/2010/main" xmlns="" w="9525">
+                <a14:hiddenLine xmlns="" xmlns:a14="http://schemas.microsoft.com/office/drawing/2010/main" w="9525">
                   <a:solidFill>
                     <a:srgbClr val="000000"/>
                   </a:solidFill>
@@ -3923,7 +3928,7 @@
             </a:ln>
             <a:extLst>
               <a:ext uri="{91240B29-F687-4f45-9708-019B960494DF}">
-                <a14:hiddenLine xmlns:a14="http://schemas.microsoft.com/office/drawing/2010/main" xmlns="" w="9525">
+                <a14:hiddenLine xmlns="" xmlns:a14="http://schemas.microsoft.com/office/drawing/2010/main" w="9525">
                   <a:solidFill>
                     <a:srgbClr val="000000"/>
                   </a:solidFill>
@@ -3995,7 +4000,7 @@
             </a:ln>
             <a:extLst>
               <a:ext uri="{91240B29-F687-4f45-9708-019B960494DF}">
-                <a14:hiddenLine xmlns:a14="http://schemas.microsoft.com/office/drawing/2010/main" xmlns="" w="9525">
+                <a14:hiddenLine xmlns="" xmlns:a14="http://schemas.microsoft.com/office/drawing/2010/main" w="9525">
                   <a:solidFill>
                     <a:srgbClr val="000000"/>
                   </a:solidFill>
@@ -4064,7 +4069,7 @@
             </a:ln>
             <a:extLst>
               <a:ext uri="{91240B29-F687-4f45-9708-019B960494DF}">
-                <a14:hiddenLine xmlns:a14="http://schemas.microsoft.com/office/drawing/2010/main" xmlns="" w="9525">
+                <a14:hiddenLine xmlns="" xmlns:a14="http://schemas.microsoft.com/office/drawing/2010/main" w="9525">
                   <a:solidFill>
                     <a:srgbClr val="000000"/>
                   </a:solidFill>
@@ -4161,7 +4166,7 @@
             </a:ln>
             <a:extLst>
               <a:ext uri="{91240B29-F687-4f45-9708-019B960494DF}">
-                <a14:hiddenLine xmlns:a14="http://schemas.microsoft.com/office/drawing/2010/main" xmlns="" w="9525">
+                <a14:hiddenLine xmlns="" xmlns:a14="http://schemas.microsoft.com/office/drawing/2010/main" w="9525">
                   <a:solidFill>
                     <a:srgbClr val="000000"/>
                   </a:solidFill>
@@ -4258,7 +4263,7 @@
             </a:ln>
             <a:extLst>
               <a:ext uri="{91240B29-F687-4f45-9708-019B960494DF}">
-                <a14:hiddenLine xmlns:a14="http://schemas.microsoft.com/office/drawing/2010/main" xmlns="" w="9525">
+                <a14:hiddenLine xmlns="" xmlns:a14="http://schemas.microsoft.com/office/drawing/2010/main" w="9525">
                   <a:solidFill>
                     <a:srgbClr val="000000"/>
                   </a:solidFill>
@@ -4327,7 +4332,7 @@
             </a:ln>
             <a:extLst>
               <a:ext uri="{91240B29-F687-4f45-9708-019B960494DF}">
-                <a14:hiddenLine xmlns:a14="http://schemas.microsoft.com/office/drawing/2010/main" xmlns="" w="9525">
+                <a14:hiddenLine xmlns="" xmlns:a14="http://schemas.microsoft.com/office/drawing/2010/main" w="9525">
                   <a:solidFill>
                     <a:srgbClr val="000000"/>
                   </a:solidFill>
@@ -4454,7 +4459,7 @@
             </a:ln>
             <a:extLst>
               <a:ext uri="{91240B29-F687-4f45-9708-019B960494DF}">
-                <a14:hiddenLine xmlns:a14="http://schemas.microsoft.com/office/drawing/2010/main" xmlns="" w="9525">
+                <a14:hiddenLine xmlns="" xmlns:a14="http://schemas.microsoft.com/office/drawing/2010/main" w="9525">
                   <a:solidFill>
                     <a:srgbClr val="000000"/>
                   </a:solidFill>
@@ -4529,7 +4534,7 @@
             </a:ln>
             <a:extLst>
               <a:ext uri="{91240B29-F687-4f45-9708-019B960494DF}">
-                <a14:hiddenLine xmlns:a14="http://schemas.microsoft.com/office/drawing/2010/main" xmlns="" w="9525">
+                <a14:hiddenLine xmlns="" xmlns:a14="http://schemas.microsoft.com/office/drawing/2010/main" w="9525">
                   <a:solidFill>
                     <a:srgbClr val="000000"/>
                   </a:solidFill>
@@ -4626,7 +4631,7 @@
             </a:ln>
             <a:extLst>
               <a:ext uri="{91240B29-F687-4f45-9708-019B960494DF}">
-                <a14:hiddenLine xmlns:a14="http://schemas.microsoft.com/office/drawing/2010/main" xmlns="" w="9525">
+                <a14:hiddenLine xmlns="" xmlns:a14="http://schemas.microsoft.com/office/drawing/2010/main" w="9525">
                   <a:solidFill>
                     <a:srgbClr val="000000"/>
                   </a:solidFill>
@@ -4773,7 +4778,7 @@
           <a:p>
             <a:fld id="{48A87A34-81AB-432B-8DAE-1953F412C126}" type="datetimeFigureOut">
               <a:rPr lang="en-US" dirty="0"/>
-              <a:t>5/4/26</a:t>
+              <a:t>5/4/2026</a:t>
             </a:fld>
             <a:endParaRPr lang="en-US" dirty="0"/>
           </a:p>
@@ -5035,7 +5040,7 @@
           <a:p>
             <a:fld id="{48A87A34-81AB-432B-8DAE-1953F412C126}" type="datetimeFigureOut">
               <a:rPr lang="en-US" dirty="0"/>
-              <a:t>5/4/26</a:t>
+              <a:t>5/4/2026</a:t>
             </a:fld>
             <a:endParaRPr lang="en-US" dirty="0"/>
           </a:p>
@@ -5226,7 +5231,7 @@
           <a:p>
             <a:fld id="{48A87A34-81AB-432B-8DAE-1953F412C126}" type="datetimeFigureOut">
               <a:rPr lang="en-US" dirty="0"/>
-              <a:t>5/4/26</a:t>
+              <a:t>5/4/2026</a:t>
             </a:fld>
             <a:endParaRPr lang="en-US" dirty="0"/>
           </a:p>
@@ -5484,7 +5489,7 @@
           <a:p>
             <a:fld id="{48A87A34-81AB-432B-8DAE-1953F412C126}" type="datetimeFigureOut">
               <a:rPr lang="en-US" dirty="0"/>
-              <a:t>5/4/26</a:t>
+              <a:t>5/4/2026</a:t>
             </a:fld>
             <a:endParaRPr lang="en-US" dirty="0"/>
           </a:p>
@@ -5913,7 +5918,7 @@
           <a:p>
             <a:fld id="{48A87A34-81AB-432B-8DAE-1953F412C126}" type="datetimeFigureOut">
               <a:rPr lang="en-US" dirty="0"/>
-              <a:t>5/4/26</a:t>
+              <a:t>5/4/2026</a:t>
             </a:fld>
             <a:endParaRPr lang="en-US" dirty="0"/>
           </a:p>
@@ -6454,7 +6459,7 @@
           <a:p>
             <a:fld id="{48A87A34-81AB-432B-8DAE-1953F412C126}" type="datetimeFigureOut">
               <a:rPr lang="en-US" dirty="0"/>
-              <a:t>5/4/26</a:t>
+              <a:t>5/4/2026</a:t>
             </a:fld>
             <a:endParaRPr lang="en-US" dirty="0"/>
           </a:p>
@@ -7169,7 +7174,7 @@
           <a:p>
             <a:fld id="{48A87A34-81AB-432B-8DAE-1953F412C126}" type="datetimeFigureOut">
               <a:rPr lang="en-US" dirty="0"/>
-              <a:t>5/4/26</a:t>
+              <a:t>5/4/2026</a:t>
             </a:fld>
             <a:endParaRPr lang="en-US" dirty="0"/>
           </a:p>
@@ -7334,7 +7339,7 @@
           <a:p>
             <a:fld id="{48A87A34-81AB-432B-8DAE-1953F412C126}" type="datetimeFigureOut">
               <a:rPr lang="en-US" dirty="0"/>
-              <a:t>5/4/26</a:t>
+              <a:t>5/4/2026</a:t>
             </a:fld>
             <a:endParaRPr lang="en-US" dirty="0"/>
           </a:p>
@@ -7509,7 +7514,7 @@
           <a:p>
             <a:fld id="{48A87A34-81AB-432B-8DAE-1953F412C126}" type="datetimeFigureOut">
               <a:rPr lang="en-US" dirty="0"/>
-              <a:t>5/4/26</a:t>
+              <a:t>5/4/2026</a:t>
             </a:fld>
             <a:endParaRPr lang="en-US" dirty="0"/>
           </a:p>
@@ -7674,7 +7679,7 @@
           <a:p>
             <a:fld id="{48A87A34-81AB-432B-8DAE-1953F412C126}" type="datetimeFigureOut">
               <a:rPr lang="en-US" dirty="0"/>
-              <a:t>5/4/26</a:t>
+              <a:t>5/4/2026</a:t>
             </a:fld>
             <a:endParaRPr lang="en-US" dirty="0"/>
           </a:p>
@@ -7919,7 +7924,7 @@
           <a:p>
             <a:fld id="{48A87A34-81AB-432B-8DAE-1953F412C126}" type="datetimeFigureOut">
               <a:rPr lang="en-US" dirty="0"/>
-              <a:t>5/4/26</a:t>
+              <a:t>5/4/2026</a:t>
             </a:fld>
             <a:endParaRPr lang="en-US" dirty="0"/>
           </a:p>
@@ -8146,7 +8151,7 @@
           <a:p>
             <a:fld id="{48A87A34-81AB-432B-8DAE-1953F412C126}" type="datetimeFigureOut">
               <a:rPr lang="en-US" dirty="0"/>
-              <a:t>5/4/26</a:t>
+              <a:t>5/4/2026</a:t>
             </a:fld>
             <a:endParaRPr lang="en-US" dirty="0"/>
           </a:p>
@@ -8522,7 +8527,7 @@
           <a:p>
             <a:fld id="{48A87A34-81AB-432B-8DAE-1953F412C126}" type="datetimeFigureOut">
               <a:rPr lang="en-US" dirty="0"/>
-              <a:t>5/4/26</a:t>
+              <a:t>5/4/2026</a:t>
             </a:fld>
             <a:endParaRPr lang="en-US" dirty="0"/>
           </a:p>
@@ -8635,7 +8640,7 @@
           <a:p>
             <a:fld id="{48A87A34-81AB-432B-8DAE-1953F412C126}" type="datetimeFigureOut">
               <a:rPr lang="en-US" dirty="0"/>
-              <a:t>5/4/26</a:t>
+              <a:t>5/4/2026</a:t>
             </a:fld>
             <a:endParaRPr lang="en-US" dirty="0"/>
           </a:p>
@@ -8725,7 +8730,7 @@
           <a:p>
             <a:fld id="{48A87A34-81AB-432B-8DAE-1953F412C126}" type="datetimeFigureOut">
               <a:rPr lang="en-US" dirty="0"/>
-              <a:t>5/4/26</a:t>
+              <a:t>5/4/2026</a:t>
             </a:fld>
             <a:endParaRPr lang="en-US" dirty="0"/>
           </a:p>
@@ -8969,7 +8974,7 @@
           <a:p>
             <a:fld id="{48A87A34-81AB-432B-8DAE-1953F412C126}" type="datetimeFigureOut">
               <a:rPr lang="en-US" dirty="0"/>
-              <a:t>5/4/26</a:t>
+              <a:t>5/4/2026</a:t>
             </a:fld>
             <a:endParaRPr lang="en-US" dirty="0"/>
           </a:p>
@@ -9244,7 +9249,7 @@
           <a:p>
             <a:fld id="{48A87A34-81AB-432B-8DAE-1953F412C126}" type="datetimeFigureOut">
               <a:rPr lang="en-US" dirty="0"/>
-              <a:t>5/4/26</a:t>
+              <a:t>5/4/2026</a:t>
             </a:fld>
             <a:endParaRPr lang="en-US" dirty="0"/>
           </a:p>
@@ -9355,7 +9360,7 @@
           <a:noFill/>
           <a:extLst>
             <a:ext uri="{909E8E84-426E-40dd-AFC4-6F175D3DCCD1}">
-              <a14:hiddenFill xmlns:a14="http://schemas.microsoft.com/office/drawing/2010/main" xmlns="">
+              <a14:hiddenFill xmlns="" xmlns:a14="http://schemas.microsoft.com/office/drawing/2010/main">
                 <a:solidFill>
                   <a:srgbClr val="FFFFFF"/>
                 </a:solidFill>
@@ -9429,7 +9434,7 @@
               </a:ln>
               <a:extLst>
                 <a:ext uri="{91240B29-F687-4f45-9708-019B960494DF}">
-                  <a14:hiddenLine xmlns:a14="http://schemas.microsoft.com/office/drawing/2010/main" xmlns="" w="9525">
+                  <a14:hiddenLine xmlns="" xmlns:a14="http://schemas.microsoft.com/office/drawing/2010/main" w="9525">
                     <a:solidFill>
                       <a:srgbClr val="000000"/>
                     </a:solidFill>
@@ -9526,7 +9531,7 @@
               </a:ln>
               <a:extLst>
                 <a:ext uri="{91240B29-F687-4f45-9708-019B960494DF}">
-                  <a14:hiddenLine xmlns:a14="http://schemas.microsoft.com/office/drawing/2010/main" xmlns="" w="9525">
+                  <a14:hiddenLine xmlns="" xmlns:a14="http://schemas.microsoft.com/office/drawing/2010/main" w="9525">
                     <a:solidFill>
                       <a:srgbClr val="000000"/>
                     </a:solidFill>
@@ -9623,7 +9628,7 @@
               </a:ln>
               <a:extLst>
                 <a:ext uri="{91240B29-F687-4f45-9708-019B960494DF}">
-                  <a14:hiddenLine xmlns:a14="http://schemas.microsoft.com/office/drawing/2010/main" xmlns="" w="9525">
+                  <a14:hiddenLine xmlns="" xmlns:a14="http://schemas.microsoft.com/office/drawing/2010/main" w="9525">
                     <a:solidFill>
                       <a:srgbClr val="000000"/>
                     </a:solidFill>
@@ -9692,7 +9697,7 @@
               </a:ln>
               <a:extLst>
                 <a:ext uri="{91240B29-F687-4f45-9708-019B960494DF}">
-                  <a14:hiddenLine xmlns:a14="http://schemas.microsoft.com/office/drawing/2010/main" xmlns="" w="9525">
+                  <a14:hiddenLine xmlns="" xmlns:a14="http://schemas.microsoft.com/office/drawing/2010/main" w="9525">
                     <a:solidFill>
                       <a:srgbClr val="000000"/>
                     </a:solidFill>
@@ -9789,7 +9794,7 @@
               </a:ln>
               <a:extLst>
                 <a:ext uri="{91240B29-F687-4f45-9708-019B960494DF}">
-                  <a14:hiddenLine xmlns:a14="http://schemas.microsoft.com/office/drawing/2010/main" xmlns="" w="9525">
+                  <a14:hiddenLine xmlns="" xmlns:a14="http://schemas.microsoft.com/office/drawing/2010/main" w="9525">
                     <a:solidFill>
                       <a:srgbClr val="000000"/>
                     </a:solidFill>
@@ -9858,7 +9863,7 @@
               </a:ln>
               <a:extLst>
                 <a:ext uri="{91240B29-F687-4f45-9708-019B960494DF}">
-                  <a14:hiddenLine xmlns:a14="http://schemas.microsoft.com/office/drawing/2010/main" xmlns="" w="9525">
+                  <a14:hiddenLine xmlns="" xmlns:a14="http://schemas.microsoft.com/office/drawing/2010/main" w="9525">
                     <a:solidFill>
                       <a:srgbClr val="000000"/>
                     </a:solidFill>
@@ -9927,7 +9932,7 @@
               </a:ln>
               <a:extLst>
                 <a:ext uri="{91240B29-F687-4f45-9708-019B960494DF}">
-                  <a14:hiddenLine xmlns:a14="http://schemas.microsoft.com/office/drawing/2010/main" xmlns="" w="9525">
+                  <a14:hiddenLine xmlns="" xmlns:a14="http://schemas.microsoft.com/office/drawing/2010/main" w="9525">
                     <a:solidFill>
                       <a:srgbClr val="000000"/>
                     </a:solidFill>
@@ -10024,7 +10029,7 @@
               </a:ln>
               <a:extLst>
                 <a:ext uri="{91240B29-F687-4f45-9708-019B960494DF}">
-                  <a14:hiddenLine xmlns:a14="http://schemas.microsoft.com/office/drawing/2010/main" xmlns="" w="9525">
+                  <a14:hiddenLine xmlns="" xmlns:a14="http://schemas.microsoft.com/office/drawing/2010/main" w="9525">
                     <a:solidFill>
                       <a:srgbClr val="000000"/>
                     </a:solidFill>
@@ -10121,7 +10126,7 @@
               </a:ln>
               <a:extLst>
                 <a:ext uri="{91240B29-F687-4f45-9708-019B960494DF}">
-                  <a14:hiddenLine xmlns:a14="http://schemas.microsoft.com/office/drawing/2010/main" xmlns="" w="9525">
+                  <a14:hiddenLine xmlns="" xmlns:a14="http://schemas.microsoft.com/office/drawing/2010/main" w="9525">
                     <a:solidFill>
                       <a:srgbClr val="000000"/>
                     </a:solidFill>
@@ -10190,7 +10195,7 @@
               </a:ln>
               <a:extLst>
                 <a:ext uri="{91240B29-F687-4f45-9708-019B960494DF}">
-                  <a14:hiddenLine xmlns:a14="http://schemas.microsoft.com/office/drawing/2010/main" xmlns="" w="9525">
+                  <a14:hiddenLine xmlns="" xmlns:a14="http://schemas.microsoft.com/office/drawing/2010/main" w="9525">
                     <a:solidFill>
                       <a:srgbClr val="000000"/>
                     </a:solidFill>
@@ -10307,7 +10312,7 @@
               </a:ln>
               <a:extLst>
                 <a:ext uri="{91240B29-F687-4f45-9708-019B960494DF}">
-                  <a14:hiddenLine xmlns:a14="http://schemas.microsoft.com/office/drawing/2010/main" xmlns="" w="9525">
+                  <a14:hiddenLine xmlns="" xmlns:a14="http://schemas.microsoft.com/office/drawing/2010/main" w="9525">
                     <a:solidFill>
                       <a:srgbClr val="000000"/>
                     </a:solidFill>
@@ -10405,7 +10410,7 @@
               </a:ln>
               <a:extLst>
                 <a:ext uri="{91240B29-F687-4f45-9708-019B960494DF}">
-                  <a14:hiddenLine xmlns:a14="http://schemas.microsoft.com/office/drawing/2010/main" xmlns="" w="9525">
+                  <a14:hiddenLine xmlns="" xmlns:a14="http://schemas.microsoft.com/office/drawing/2010/main" w="9525">
                     <a:solidFill>
                       <a:srgbClr val="000000"/>
                     </a:solidFill>
@@ -10474,7 +10479,7 @@
               </a:ln>
               <a:extLst>
                 <a:ext uri="{91240B29-F687-4f45-9708-019B960494DF}">
-                  <a14:hiddenLine xmlns:a14="http://schemas.microsoft.com/office/drawing/2010/main" xmlns="" w="9525">
+                  <a14:hiddenLine xmlns="" xmlns:a14="http://schemas.microsoft.com/office/drawing/2010/main" w="9525">
                     <a:solidFill>
                       <a:srgbClr val="000000"/>
                     </a:solidFill>
@@ -10543,7 +10548,7 @@
               </a:ln>
               <a:extLst>
                 <a:ext uri="{91240B29-F687-4f45-9708-019B960494DF}">
-                  <a14:hiddenLine xmlns:a14="http://schemas.microsoft.com/office/drawing/2010/main" xmlns="" w="9525">
+                  <a14:hiddenLine xmlns="" xmlns:a14="http://schemas.microsoft.com/office/drawing/2010/main" w="9525">
                     <a:solidFill>
                       <a:srgbClr val="000000"/>
                     </a:solidFill>
@@ -10640,7 +10645,7 @@
               </a:ln>
               <a:extLst>
                 <a:ext uri="{91240B29-F687-4f45-9708-019B960494DF}">
-                  <a14:hiddenLine xmlns:a14="http://schemas.microsoft.com/office/drawing/2010/main" xmlns="" w="9525">
+                  <a14:hiddenLine xmlns="" xmlns:a14="http://schemas.microsoft.com/office/drawing/2010/main" w="9525">
                     <a:solidFill>
                       <a:srgbClr val="000000"/>
                     </a:solidFill>
@@ -10681,7 +10686,7 @@
               </a:ln>
               <a:extLst>
                 <a:ext uri="{91240B29-F687-4f45-9708-019B960494DF}">
-                  <a14:hiddenLine xmlns:a14="http://schemas.microsoft.com/office/drawing/2010/main" xmlns="" w="9525">
+                  <a14:hiddenLine xmlns="" xmlns:a14="http://schemas.microsoft.com/office/drawing/2010/main" w="9525">
                     <a:solidFill>
                       <a:srgbClr val="000000"/>
                     </a:solidFill>
@@ -10753,7 +10758,7 @@
               </a:ln>
               <a:extLst>
                 <a:ext uri="{91240B29-F687-4f45-9708-019B960494DF}">
-                  <a14:hiddenLine xmlns:a14="http://schemas.microsoft.com/office/drawing/2010/main" xmlns="" w="9525">
+                  <a14:hiddenLine xmlns="" xmlns:a14="http://schemas.microsoft.com/office/drawing/2010/main" w="9525">
                     <a:solidFill>
                       <a:srgbClr val="000000"/>
                     </a:solidFill>
@@ -10850,7 +10855,7 @@
               </a:ln>
               <a:extLst>
                 <a:ext uri="{91240B29-F687-4f45-9708-019B960494DF}">
-                  <a14:hiddenLine xmlns:a14="http://schemas.microsoft.com/office/drawing/2010/main" xmlns="" w="9525">
+                  <a14:hiddenLine xmlns="" xmlns:a14="http://schemas.microsoft.com/office/drawing/2010/main" w="9525">
                     <a:solidFill>
                       <a:srgbClr val="000000"/>
                     </a:solidFill>
@@ -10919,7 +10924,7 @@
               </a:ln>
               <a:extLst>
                 <a:ext uri="{91240B29-F687-4f45-9708-019B960494DF}">
-                  <a14:hiddenLine xmlns:a14="http://schemas.microsoft.com/office/drawing/2010/main" xmlns="" w="9525">
+                  <a14:hiddenLine xmlns="" xmlns:a14="http://schemas.microsoft.com/office/drawing/2010/main" w="9525">
                     <a:solidFill>
                       <a:srgbClr val="000000"/>
                     </a:solidFill>
@@ -11016,7 +11021,7 @@
               </a:ln>
               <a:extLst>
                 <a:ext uri="{91240B29-F687-4f45-9708-019B960494DF}">
-                  <a14:hiddenLine xmlns:a14="http://schemas.microsoft.com/office/drawing/2010/main" xmlns="" w="9525">
+                  <a14:hiddenLine xmlns="" xmlns:a14="http://schemas.microsoft.com/office/drawing/2010/main" w="9525">
                     <a:solidFill>
                       <a:srgbClr val="000000"/>
                     </a:solidFill>
@@ -11088,7 +11093,7 @@
               </a:ln>
               <a:extLst>
                 <a:ext uri="{91240B29-F687-4f45-9708-019B960494DF}">
-                  <a14:hiddenLine xmlns:a14="http://schemas.microsoft.com/office/drawing/2010/main" xmlns="" w="9525">
+                  <a14:hiddenLine xmlns="" xmlns:a14="http://schemas.microsoft.com/office/drawing/2010/main" w="9525">
                     <a:solidFill>
                       <a:srgbClr val="000000"/>
                     </a:solidFill>
@@ -11157,7 +11162,7 @@
               </a:ln>
               <a:extLst>
                 <a:ext uri="{91240B29-F687-4f45-9708-019B960494DF}">
-                  <a14:hiddenLine xmlns:a14="http://schemas.microsoft.com/office/drawing/2010/main" xmlns="" w="9525">
+                  <a14:hiddenLine xmlns="" xmlns:a14="http://schemas.microsoft.com/office/drawing/2010/main" w="9525">
                     <a:solidFill>
                       <a:srgbClr val="000000"/>
                     </a:solidFill>
@@ -11254,7 +11259,7 @@
               </a:ln>
               <a:extLst>
                 <a:ext uri="{91240B29-F687-4f45-9708-019B960494DF}">
-                  <a14:hiddenLine xmlns:a14="http://schemas.microsoft.com/office/drawing/2010/main" xmlns="" w="9525">
+                  <a14:hiddenLine xmlns="" xmlns:a14="http://schemas.microsoft.com/office/drawing/2010/main" w="9525">
                     <a:solidFill>
                       <a:srgbClr val="000000"/>
                     </a:solidFill>
@@ -11351,7 +11356,7 @@
               </a:ln>
               <a:extLst>
                 <a:ext uri="{91240B29-F687-4f45-9708-019B960494DF}">
-                  <a14:hiddenLine xmlns:a14="http://schemas.microsoft.com/office/drawing/2010/main" xmlns="" w="9525">
+                  <a14:hiddenLine xmlns="" xmlns:a14="http://schemas.microsoft.com/office/drawing/2010/main" w="9525">
                     <a:solidFill>
                       <a:srgbClr val="000000"/>
                     </a:solidFill>
@@ -11423,7 +11428,7 @@
               </a:ln>
               <a:extLst>
                 <a:ext uri="{91240B29-F687-4f45-9708-019B960494DF}">
-                  <a14:hiddenLine xmlns:a14="http://schemas.microsoft.com/office/drawing/2010/main" xmlns="" w="9525">
+                  <a14:hiddenLine xmlns="" xmlns:a14="http://schemas.microsoft.com/office/drawing/2010/main" w="9525">
                     <a:solidFill>
                       <a:srgbClr val="000000"/>
                     </a:solidFill>
@@ -11550,7 +11555,7 @@
               </a:ln>
               <a:extLst>
                 <a:ext uri="{91240B29-F687-4f45-9708-019B960494DF}">
-                  <a14:hiddenLine xmlns:a14="http://schemas.microsoft.com/office/drawing/2010/main" xmlns="" w="9525">
+                  <a14:hiddenLine xmlns="" xmlns:a14="http://schemas.microsoft.com/office/drawing/2010/main" w="9525">
                     <a:solidFill>
                       <a:srgbClr val="000000"/>
                     </a:solidFill>
@@ -11655,7 +11660,7 @@
               </a:ln>
               <a:extLst>
                 <a:ext uri="{91240B29-F687-4f45-9708-019B960494DF}">
-                  <a14:hiddenLine xmlns:a14="http://schemas.microsoft.com/office/drawing/2010/main" xmlns="" w="9525">
+                  <a14:hiddenLine xmlns="" xmlns:a14="http://schemas.microsoft.com/office/drawing/2010/main" w="9525">
                     <a:solidFill>
                       <a:srgbClr val="000000"/>
                     </a:solidFill>
@@ -11777,7 +11782,7 @@
               </a:ln>
               <a:extLst>
                 <a:ext uri="{91240B29-F687-4f45-9708-019B960494DF}">
-                  <a14:hiddenLine xmlns:a14="http://schemas.microsoft.com/office/drawing/2010/main" xmlns="" w="9525">
+                  <a14:hiddenLine xmlns="" xmlns:a14="http://schemas.microsoft.com/office/drawing/2010/main" w="9525">
                     <a:solidFill>
                       <a:srgbClr val="000000"/>
                     </a:solidFill>
@@ -11874,7 +11879,7 @@
               </a:ln>
               <a:extLst>
                 <a:ext uri="{91240B29-F687-4f45-9708-019B960494DF}">
-                  <a14:hiddenLine xmlns:a14="http://schemas.microsoft.com/office/drawing/2010/main" xmlns="" w="9525">
+                  <a14:hiddenLine xmlns="" xmlns:a14="http://schemas.microsoft.com/office/drawing/2010/main" w="9525">
                     <a:solidFill>
                       <a:srgbClr val="000000"/>
                     </a:solidFill>
@@ -11946,7 +11951,7 @@
               </a:ln>
               <a:extLst>
                 <a:ext uri="{91240B29-F687-4f45-9708-019B960494DF}">
-                  <a14:hiddenLine xmlns:a14="http://schemas.microsoft.com/office/drawing/2010/main" xmlns="" w="9525">
+                  <a14:hiddenLine xmlns="" xmlns:a14="http://schemas.microsoft.com/office/drawing/2010/main" w="9525">
                     <a:solidFill>
                       <a:srgbClr val="000000"/>
                     </a:solidFill>
@@ -12043,7 +12048,7 @@
               </a:ln>
               <a:extLst>
                 <a:ext uri="{91240B29-F687-4f45-9708-019B960494DF}">
-                  <a14:hiddenLine xmlns:a14="http://schemas.microsoft.com/office/drawing/2010/main" xmlns="" w="9525">
+                  <a14:hiddenLine xmlns="" xmlns:a14="http://schemas.microsoft.com/office/drawing/2010/main" w="9525">
                     <a:solidFill>
                       <a:srgbClr val="000000"/>
                     </a:solidFill>
@@ -12118,7 +12123,7 @@
               </a:ln>
               <a:extLst>
                 <a:ext uri="{91240B29-F687-4f45-9708-019B960494DF}">
-                  <a14:hiddenLine xmlns:a14="http://schemas.microsoft.com/office/drawing/2010/main" xmlns="" w="9525">
+                  <a14:hiddenLine xmlns="" xmlns:a14="http://schemas.microsoft.com/office/drawing/2010/main" w="9525">
                     <a:solidFill>
                       <a:srgbClr val="000000"/>
                     </a:solidFill>
@@ -12215,7 +12220,7 @@
               </a:ln>
               <a:extLst>
                 <a:ext uri="{91240B29-F687-4f45-9708-019B960494DF}">
-                  <a14:hiddenLine xmlns:a14="http://schemas.microsoft.com/office/drawing/2010/main" xmlns="" w="9525">
+                  <a14:hiddenLine xmlns="" xmlns:a14="http://schemas.microsoft.com/office/drawing/2010/main" w="9525">
                     <a:solidFill>
                       <a:srgbClr val="000000"/>
                     </a:solidFill>
@@ -12290,7 +12295,7 @@
               </a:ln>
               <a:extLst>
                 <a:ext uri="{91240B29-F687-4f45-9708-019B960494DF}">
-                  <a14:hiddenLine xmlns:a14="http://schemas.microsoft.com/office/drawing/2010/main" xmlns="" w="9525">
+                  <a14:hiddenLine xmlns="" xmlns:a14="http://schemas.microsoft.com/office/drawing/2010/main" w="9525">
                     <a:solidFill>
                       <a:srgbClr val="000000"/>
                     </a:solidFill>
@@ -12387,7 +12392,7 @@
               </a:ln>
               <a:extLst>
                 <a:ext uri="{91240B29-F687-4f45-9708-019B960494DF}">
-                  <a14:hiddenLine xmlns:a14="http://schemas.microsoft.com/office/drawing/2010/main" xmlns="" w="9525">
+                  <a14:hiddenLine xmlns="" xmlns:a14="http://schemas.microsoft.com/office/drawing/2010/main" w="9525">
                     <a:solidFill>
                       <a:srgbClr val="000000"/>
                     </a:solidFill>
@@ -12428,7 +12433,7 @@
               </a:ln>
               <a:extLst>
                 <a:ext uri="{91240B29-F687-4f45-9708-019B960494DF}">
-                  <a14:hiddenLine xmlns:a14="http://schemas.microsoft.com/office/drawing/2010/main" xmlns="" w="9525">
+                  <a14:hiddenLine xmlns="" xmlns:a14="http://schemas.microsoft.com/office/drawing/2010/main" w="9525">
                     <a:solidFill>
                       <a:srgbClr val="000000"/>
                     </a:solidFill>
@@ -12576,7 +12581,7 @@
             <a:fld id="{48A87A34-81AB-432B-8DAE-1953F412C126}" type="datetimeFigureOut">
               <a:rPr lang="en-US" dirty="0"/>
               <a:pPr/>
-              <a:t>5/4/26</a:t>
+              <a:t>5/4/2026</a:t>
             </a:fld>
             <a:endParaRPr lang="en-US" dirty="0"/>
           </a:p>
@@ -13262,14 +13267,13 @@
         </p:nvPicPr>
         <p:blipFill>
           <a:blip r:embed="rId2"/>
-          <a:stretch>
-            <a:fillRect/>
-          </a:stretch>
+          <a:srcRect/>
+          <a:stretch/>
         </p:blipFill>
         <p:spPr>
           <a:xfrm>
-            <a:off x="1626287" y="1587500"/>
-            <a:ext cx="4318000" cy="3683000"/>
+            <a:off x="1861520" y="1587500"/>
+            <a:ext cx="3847533" cy="3683000"/>
           </a:xfrm>
           <a:prstGeom prst="rect">
             <a:avLst/>
@@ -13292,14 +13296,13 @@
         </p:nvPicPr>
         <p:blipFill>
           <a:blip r:embed="rId3"/>
-          <a:stretch>
-            <a:fillRect/>
-          </a:stretch>
+          <a:srcRect/>
+          <a:stretch/>
         </p:blipFill>
         <p:spPr>
           <a:xfrm>
-            <a:off x="6795359" y="1962150"/>
-            <a:ext cx="3568700" cy="2933700"/>
+            <a:off x="7334293" y="1066163"/>
+            <a:ext cx="3292950" cy="4725673"/>
           </a:xfrm>
           <a:prstGeom prst="rect">
             <a:avLst/>
